--- a/templates/effect/effect_A.pptx
+++ b/templates/effect/effect_A.pptx
@@ -3098,45 +3098,40 @@
       <p:grpSpPr/>
       <p:sp>
         <p:nvSpPr>
-          <p:cNvPr id="2" name="Rectangle 1"/>
-          <p:cNvSpPr/>
+          <p:cNvPr id="2" name="TextBox 1"/>
+          <p:cNvSpPr txBox="1"/>
           <p:nvPr/>
         </p:nvSpPr>
         <p:spPr>
           <a:xfrm>
-            <a:off x="0" y="0"/>
-            <a:ext cx="7560000" cy="720000"/>
+            <a:off x="432000" y="324000"/>
+            <a:ext cx="6696000" cy="396000"/>
           </a:xfrm>
           <a:prstGeom prst="rect">
             <a:avLst/>
           </a:prstGeom>
-          <a:solidFill>
-            <a:srgbClr val="122242"/>
-          </a:solidFill>
-          <a:ln>
-            <a:noFill/>
-          </a:ln>
-          <a:effectLst/>
+          <a:noFill/>
         </p:spPr>
-        <p:style>
-          <a:lnRef idx="1">
-            <a:schemeClr val="accent1"/>
-          </a:lnRef>
-          <a:fillRef idx="3">
-            <a:schemeClr val="accent1"/>
-          </a:fillRef>
-          <a:effectRef idx="2">
-            <a:schemeClr val="accent1"/>
-          </a:effectRef>
-          <a:fontRef idx="minor">
-            <a:schemeClr val="lt1"/>
-          </a:fontRef>
-        </p:style>
-        <p:txBody>
-          <a:bodyPr rtlCol="0" anchor="ctr"/>
-          <a:lstStyle/>
-          <a:p>
-            <a:pPr algn="ctr"/>
+        <p:txBody>
+          <a:bodyPr wrap="square" anchor="t" lIns="0" rIns="0" tIns="0" bIns="0">
+            <a:spAutoFit/>
+          </a:bodyPr>
+          <a:lstStyle/>
+          <a:p>
+            <a:pPr algn="l">
+              <a:lnSpc>
+                <a:spcPct val="115000"/>
+              </a:lnSpc>
+            </a:pPr>
+            <a:r>
+              <a:rPr sz="1900" b="1">
+                <a:solidFill>
+                  <a:srgbClr val="122242"/>
+                </a:solidFill>
+                <a:latin typeface="맑은 고딕"/>
+              </a:rPr>
+              <a:t>{{PAGE_TITLE}}</a:t>
+            </a:r>
           </a:p>
         </p:txBody>
       </p:sp>
@@ -3148,8 +3143,8 @@
         </p:nvSpPr>
         <p:spPr>
           <a:xfrm>
-            <a:off x="0" y="720000"/>
-            <a:ext cx="7560000" cy="27940"/>
+            <a:off x="432000" y="738000"/>
+            <a:ext cx="504000" cy="30480"/>
           </a:xfrm>
           <a:prstGeom prst="rect">
             <a:avLst/>
@@ -3186,92 +3181,14 @@
       </p:sp>
       <p:sp>
         <p:nvSpPr>
-          <p:cNvPr id="4" name="TextBox 3"/>
-          <p:cNvSpPr txBox="1"/>
+          <p:cNvPr id="4" name="PHOTO_1"/>
+          <p:cNvSpPr/>
           <p:nvPr/>
         </p:nvSpPr>
         <p:spPr>
           <a:xfrm>
-            <a:off x="432000" y="126000"/>
-            <a:ext cx="6696000" cy="468000"/>
-          </a:xfrm>
-          <a:prstGeom prst="rect">
-            <a:avLst/>
-          </a:prstGeom>
-          <a:noFill/>
-        </p:spPr>
-        <p:txBody>
-          <a:bodyPr wrap="square" anchor="ctr" lIns="0" rIns="0" tIns="0" bIns="0">
-            <a:spAutoFit/>
-          </a:bodyPr>
-          <a:lstStyle/>
-          <a:p>
-            <a:pPr algn="l">
-              <a:lnSpc>
-                <a:spcPct val="115000"/>
-              </a:lnSpc>
-            </a:pPr>
-            <a:r>
-              <a:rPr sz="2200" b="1">
-                <a:solidFill>
-                  <a:srgbClr val="FFFFFF"/>
-                </a:solidFill>
-                <a:latin typeface="맑은 고딕"/>
-              </a:rPr>
-              <a:t>{{PAGE_TITLE}}</a:t>
-            </a:r>
-          </a:p>
-        </p:txBody>
-      </p:sp>
-      <p:sp>
-        <p:nvSpPr>
-          <p:cNvPr id="5" name="TextBox 4"/>
-          <p:cNvSpPr txBox="1"/>
-          <p:nvPr/>
-        </p:nvSpPr>
-        <p:spPr>
-          <a:xfrm>
-            <a:off x="6480000" y="10260000"/>
-            <a:ext cx="720000" cy="288000"/>
-          </a:xfrm>
-          <a:prstGeom prst="rect">
-            <a:avLst/>
-          </a:prstGeom>
-          <a:noFill/>
-        </p:spPr>
-        <p:txBody>
-          <a:bodyPr wrap="square" anchor="t" lIns="0" rIns="0" tIns="0" bIns="0">
-            <a:spAutoFit/>
-          </a:bodyPr>
-          <a:lstStyle/>
-          <a:p>
-            <a:pPr algn="r">
-              <a:lnSpc>
-                <a:spcPct val="115000"/>
-              </a:lnSpc>
-            </a:pPr>
-            <a:r>
-              <a:rPr sz="900" b="0">
-                <a:solidFill>
-                  <a:srgbClr val="969BA5"/>
-                </a:solidFill>
-                <a:latin typeface="맑은 고딕"/>
-              </a:rPr>
-              <a:t>02</a:t>
-            </a:r>
-          </a:p>
-        </p:txBody>
-      </p:sp>
-      <p:sp>
-        <p:nvSpPr>
-          <p:cNvPr id="6" name="PHOTO_1"/>
-          <p:cNvSpPr/>
-          <p:nvPr/>
-        </p:nvSpPr>
-        <p:spPr>
-          <a:xfrm>
-            <a:off x="432000" y="972000"/>
-            <a:ext cx="6696000" cy="5220000"/>
+            <a:off x="432000" y="900000"/>
+            <a:ext cx="6696000" cy="5760000"/>
           </a:xfrm>
           <a:prstGeom prst="rect">
             <a:avLst/>
@@ -3308,28 +3225,67 @@
       </p:sp>
       <p:grpSp>
         <p:nvGrpSpPr>
-          <p:cNvPr id="10" name="GROUP_CHIP_1"/>
+          <p:cNvPr id="8" name="GROUP_CHIP_1"/>
           <p:cNvGrpSpPr/>
           <p:nvPr/>
         </p:nvGrpSpPr>
         <p:grpSpPr>
           <a:xfrm>
-            <a:off x="432000" y="6480000"/>
-            <a:ext cx="6696000" cy="612000"/>
-            <a:chOff x="432000" y="6480000"/>
-            <a:chExt cx="6696000" cy="612000"/>
+            <a:off x="432000" y="7020000"/>
+            <a:ext cx="1512000" cy="1224000"/>
+            <a:chOff x="432000" y="7020000"/>
+            <a:chExt cx="1512000" cy="1224000"/>
           </a:xfrm>
         </p:grpSpPr>
         <p:sp>
           <p:nvSpPr>
-            <p:cNvPr id="7" name="Rectangle 6"/>
+            <p:cNvPr id="5" name="TextBox 4"/>
+            <p:cNvSpPr txBox="1"/>
+            <p:nvPr/>
+          </p:nvSpPr>
+          <p:spPr>
+            <a:xfrm>
+              <a:off x="432000" y="7020000"/>
+              <a:ext cx="1512000" cy="396000"/>
+            </a:xfrm>
+            <a:prstGeom prst="rect">
+              <a:avLst/>
+            </a:prstGeom>
+            <a:noFill/>
+          </p:spPr>
+          <p:txBody>
+            <a:bodyPr wrap="square" anchor="t" lIns="0" rIns="0" tIns="0" bIns="0">
+              <a:spAutoFit/>
+            </a:bodyPr>
+            <a:lstStyle/>
+            <a:p>
+              <a:pPr algn="l">
+                <a:lnSpc>
+                  <a:spcPct val="115000"/>
+                </a:lnSpc>
+              </a:pPr>
+              <a:r>
+                <a:rPr sz="1800" b="1">
+                  <a:solidFill>
+                    <a:srgbClr val="B08D57"/>
+                  </a:solidFill>
+                  <a:latin typeface="맑은 고딕"/>
+                </a:rPr>
+                <a:t>01</a:t>
+              </a:r>
+            </a:p>
+          </p:txBody>
+        </p:sp>
+        <p:sp>
+          <p:nvSpPr>
+            <p:cNvPr id="6" name="Rectangle 5"/>
             <p:cNvSpPr/>
             <p:nvPr/>
           </p:nvSpPr>
           <p:spPr>
             <a:xfrm>
-              <a:off x="432000" y="6480000"/>
-              <a:ext cx="6696000" cy="612000"/>
+              <a:off x="432000" y="7416000"/>
+              <a:ext cx="288000" cy="15240"/>
             </a:xfrm>
             <a:prstGeom prst="rect">
               <a:avLst/>
@@ -3366,58 +3322,14 @@
         </p:sp>
         <p:sp>
           <p:nvSpPr>
-            <p:cNvPr id="8" name="Rectangle 7"/>
-            <p:cNvSpPr/>
-            <p:nvPr/>
-          </p:nvSpPr>
-          <p:spPr>
-            <a:xfrm>
-              <a:off x="432000" y="6480000"/>
-              <a:ext cx="108000" cy="612000"/>
-            </a:xfrm>
-            <a:prstGeom prst="rect">
-              <a:avLst/>
-            </a:prstGeom>
-            <a:solidFill>
-              <a:srgbClr val="B08D57"/>
-            </a:solidFill>
-            <a:ln>
-              <a:noFill/>
-            </a:ln>
-            <a:effectLst/>
-          </p:spPr>
-          <p:style>
-            <a:lnRef idx="1">
-              <a:schemeClr val="accent1"/>
-            </a:lnRef>
-            <a:fillRef idx="3">
-              <a:schemeClr val="accent1"/>
-            </a:fillRef>
-            <a:effectRef idx="2">
-              <a:schemeClr val="accent1"/>
-            </a:effectRef>
-            <a:fontRef idx="minor">
-              <a:schemeClr val="lt1"/>
-            </a:fontRef>
-          </p:style>
-          <p:txBody>
-            <a:bodyPr rtlCol="0" anchor="ctr"/>
-            <a:lstStyle/>
-            <a:p>
-              <a:pPr algn="ctr"/>
-            </a:p>
-          </p:txBody>
-        </p:sp>
-        <p:sp>
-          <p:nvSpPr>
-            <p:cNvPr id="9" name="TextBox 8"/>
+            <p:cNvPr id="7" name="TextBox 6"/>
             <p:cNvSpPr txBox="1"/>
             <p:nvPr/>
           </p:nvSpPr>
           <p:spPr>
             <a:xfrm>
-              <a:off x="720000" y="6480000"/>
-              <a:ext cx="6264000" cy="612000"/>
+              <a:off x="432000" y="7524000"/>
+              <a:ext cx="1512000" cy="720000"/>
             </a:xfrm>
             <a:prstGeom prst="rect">
               <a:avLst/>
@@ -3425,7 +3337,7 @@
             <a:noFill/>
           </p:spPr>
           <p:txBody>
-            <a:bodyPr wrap="square" anchor="ctr" lIns="0" rIns="0" tIns="0" bIns="0">
+            <a:bodyPr wrap="square" anchor="t" lIns="0" rIns="0" tIns="0" bIns="0">
               <a:spAutoFit/>
             </a:bodyPr>
             <a:lstStyle/>
@@ -3436,7 +3348,7 @@
                 </a:lnSpc>
               </a:pPr>
               <a:r>
-                <a:rPr sz="1300" b="0">
+                <a:rPr sz="1100" b="0">
                   <a:solidFill>
                     <a:srgbClr val="373C46"/>
                   </a:solidFill>
@@ -3450,28 +3362,67 @@
       </p:grpSp>
       <p:grpSp>
         <p:nvGrpSpPr>
-          <p:cNvPr id="14" name="GROUP_CHIP_2"/>
+          <p:cNvPr id="12" name="GROUP_CHIP_2"/>
           <p:cNvGrpSpPr/>
           <p:nvPr/>
         </p:nvGrpSpPr>
         <p:grpSpPr>
           <a:xfrm>
-            <a:off x="432000" y="7272000"/>
-            <a:ext cx="6696000" cy="612000"/>
-            <a:chOff x="432000" y="7272000"/>
-            <a:chExt cx="6696000" cy="612000"/>
+            <a:off x="2160000" y="7020000"/>
+            <a:ext cx="1512000" cy="1224000"/>
+            <a:chOff x="2160000" y="7020000"/>
+            <a:chExt cx="1512000" cy="1224000"/>
           </a:xfrm>
         </p:grpSpPr>
         <p:sp>
           <p:nvSpPr>
-            <p:cNvPr id="11" name="Rectangle 10"/>
+            <p:cNvPr id="9" name="TextBox 8"/>
+            <p:cNvSpPr txBox="1"/>
+            <p:nvPr/>
+          </p:nvSpPr>
+          <p:spPr>
+            <a:xfrm>
+              <a:off x="2160000" y="7020000"/>
+              <a:ext cx="1512000" cy="396000"/>
+            </a:xfrm>
+            <a:prstGeom prst="rect">
+              <a:avLst/>
+            </a:prstGeom>
+            <a:noFill/>
+          </p:spPr>
+          <p:txBody>
+            <a:bodyPr wrap="square" anchor="t" lIns="0" rIns="0" tIns="0" bIns="0">
+              <a:spAutoFit/>
+            </a:bodyPr>
+            <a:lstStyle/>
+            <a:p>
+              <a:pPr algn="l">
+                <a:lnSpc>
+                  <a:spcPct val="115000"/>
+                </a:lnSpc>
+              </a:pPr>
+              <a:r>
+                <a:rPr sz="1800" b="1">
+                  <a:solidFill>
+                    <a:srgbClr val="B08D57"/>
+                  </a:solidFill>
+                  <a:latin typeface="맑은 고딕"/>
+                </a:rPr>
+                <a:t>02</a:t>
+              </a:r>
+            </a:p>
+          </p:txBody>
+        </p:sp>
+        <p:sp>
+          <p:nvSpPr>
+            <p:cNvPr id="10" name="Rectangle 9"/>
             <p:cNvSpPr/>
             <p:nvPr/>
           </p:nvSpPr>
           <p:spPr>
             <a:xfrm>
-              <a:off x="432000" y="7272000"/>
-              <a:ext cx="6696000" cy="612000"/>
+              <a:off x="2160000" y="7416000"/>
+              <a:ext cx="288000" cy="15240"/>
             </a:xfrm>
             <a:prstGeom prst="rect">
               <a:avLst/>
@@ -3508,58 +3459,14 @@
         </p:sp>
         <p:sp>
           <p:nvSpPr>
-            <p:cNvPr id="12" name="Rectangle 11"/>
-            <p:cNvSpPr/>
-            <p:nvPr/>
-          </p:nvSpPr>
-          <p:spPr>
-            <a:xfrm>
-              <a:off x="432000" y="7272000"/>
-              <a:ext cx="108000" cy="612000"/>
-            </a:xfrm>
-            <a:prstGeom prst="rect">
-              <a:avLst/>
-            </a:prstGeom>
-            <a:solidFill>
-              <a:srgbClr val="B08D57"/>
-            </a:solidFill>
-            <a:ln>
-              <a:noFill/>
-            </a:ln>
-            <a:effectLst/>
-          </p:spPr>
-          <p:style>
-            <a:lnRef idx="1">
-              <a:schemeClr val="accent1"/>
-            </a:lnRef>
-            <a:fillRef idx="3">
-              <a:schemeClr val="accent1"/>
-            </a:fillRef>
-            <a:effectRef idx="2">
-              <a:schemeClr val="accent1"/>
-            </a:effectRef>
-            <a:fontRef idx="minor">
-              <a:schemeClr val="lt1"/>
-            </a:fontRef>
-          </p:style>
-          <p:txBody>
-            <a:bodyPr rtlCol="0" anchor="ctr"/>
-            <a:lstStyle/>
-            <a:p>
-              <a:pPr algn="ctr"/>
-            </a:p>
-          </p:txBody>
-        </p:sp>
-        <p:sp>
-          <p:nvSpPr>
-            <p:cNvPr id="13" name="TextBox 12"/>
+            <p:cNvPr id="11" name="TextBox 10"/>
             <p:cNvSpPr txBox="1"/>
             <p:nvPr/>
           </p:nvSpPr>
           <p:spPr>
             <a:xfrm>
-              <a:off x="720000" y="7272000"/>
-              <a:ext cx="6264000" cy="612000"/>
+              <a:off x="2160000" y="7524000"/>
+              <a:ext cx="1512000" cy="720000"/>
             </a:xfrm>
             <a:prstGeom prst="rect">
               <a:avLst/>
@@ -3567,7 +3474,7 @@
             <a:noFill/>
           </p:spPr>
           <p:txBody>
-            <a:bodyPr wrap="square" anchor="ctr" lIns="0" rIns="0" tIns="0" bIns="0">
+            <a:bodyPr wrap="square" anchor="t" lIns="0" rIns="0" tIns="0" bIns="0">
               <a:spAutoFit/>
             </a:bodyPr>
             <a:lstStyle/>
@@ -3578,7 +3485,7 @@
                 </a:lnSpc>
               </a:pPr>
               <a:r>
-                <a:rPr sz="1300" b="0">
+                <a:rPr sz="1100" b="0">
                   <a:solidFill>
                     <a:srgbClr val="373C46"/>
                   </a:solidFill>
@@ -3592,28 +3499,67 @@
       </p:grpSp>
       <p:grpSp>
         <p:nvGrpSpPr>
-          <p:cNvPr id="18" name="GROUP_CHIP_3"/>
+          <p:cNvPr id="16" name="GROUP_CHIP_3"/>
           <p:cNvGrpSpPr/>
           <p:nvPr/>
         </p:nvGrpSpPr>
         <p:grpSpPr>
           <a:xfrm>
-            <a:off x="432000" y="8064000"/>
-            <a:ext cx="6696000" cy="612000"/>
-            <a:chOff x="432000" y="8064000"/>
-            <a:chExt cx="6696000" cy="612000"/>
+            <a:off x="3888000" y="7020000"/>
+            <a:ext cx="1512000" cy="1224000"/>
+            <a:chOff x="3888000" y="7020000"/>
+            <a:chExt cx="1512000" cy="1224000"/>
           </a:xfrm>
         </p:grpSpPr>
         <p:sp>
           <p:nvSpPr>
-            <p:cNvPr id="15" name="Rectangle 14"/>
+            <p:cNvPr id="13" name="TextBox 12"/>
+            <p:cNvSpPr txBox="1"/>
+            <p:nvPr/>
+          </p:nvSpPr>
+          <p:spPr>
+            <a:xfrm>
+              <a:off x="3888000" y="7020000"/>
+              <a:ext cx="1512000" cy="396000"/>
+            </a:xfrm>
+            <a:prstGeom prst="rect">
+              <a:avLst/>
+            </a:prstGeom>
+            <a:noFill/>
+          </p:spPr>
+          <p:txBody>
+            <a:bodyPr wrap="square" anchor="t" lIns="0" rIns="0" tIns="0" bIns="0">
+              <a:spAutoFit/>
+            </a:bodyPr>
+            <a:lstStyle/>
+            <a:p>
+              <a:pPr algn="l">
+                <a:lnSpc>
+                  <a:spcPct val="115000"/>
+                </a:lnSpc>
+              </a:pPr>
+              <a:r>
+                <a:rPr sz="1800" b="1">
+                  <a:solidFill>
+                    <a:srgbClr val="B08D57"/>
+                  </a:solidFill>
+                  <a:latin typeface="맑은 고딕"/>
+                </a:rPr>
+                <a:t>03</a:t>
+              </a:r>
+            </a:p>
+          </p:txBody>
+        </p:sp>
+        <p:sp>
+          <p:nvSpPr>
+            <p:cNvPr id="14" name="Rectangle 13"/>
             <p:cNvSpPr/>
             <p:nvPr/>
           </p:nvSpPr>
           <p:spPr>
             <a:xfrm>
-              <a:off x="432000" y="8064000"/>
-              <a:ext cx="6696000" cy="612000"/>
+              <a:off x="3888000" y="7416000"/>
+              <a:ext cx="288000" cy="15240"/>
             </a:xfrm>
             <a:prstGeom prst="rect">
               <a:avLst/>
@@ -3650,58 +3596,14 @@
         </p:sp>
         <p:sp>
           <p:nvSpPr>
-            <p:cNvPr id="16" name="Rectangle 15"/>
-            <p:cNvSpPr/>
-            <p:nvPr/>
-          </p:nvSpPr>
-          <p:spPr>
-            <a:xfrm>
-              <a:off x="432000" y="8064000"/>
-              <a:ext cx="108000" cy="612000"/>
-            </a:xfrm>
-            <a:prstGeom prst="rect">
-              <a:avLst/>
-            </a:prstGeom>
-            <a:solidFill>
-              <a:srgbClr val="B08D57"/>
-            </a:solidFill>
-            <a:ln>
-              <a:noFill/>
-            </a:ln>
-            <a:effectLst/>
-          </p:spPr>
-          <p:style>
-            <a:lnRef idx="1">
-              <a:schemeClr val="accent1"/>
-            </a:lnRef>
-            <a:fillRef idx="3">
-              <a:schemeClr val="accent1"/>
-            </a:fillRef>
-            <a:effectRef idx="2">
-              <a:schemeClr val="accent1"/>
-            </a:effectRef>
-            <a:fontRef idx="minor">
-              <a:schemeClr val="lt1"/>
-            </a:fontRef>
-          </p:style>
-          <p:txBody>
-            <a:bodyPr rtlCol="0" anchor="ctr"/>
-            <a:lstStyle/>
-            <a:p>
-              <a:pPr algn="ctr"/>
-            </a:p>
-          </p:txBody>
-        </p:sp>
-        <p:sp>
-          <p:nvSpPr>
-            <p:cNvPr id="17" name="TextBox 16"/>
+            <p:cNvPr id="15" name="TextBox 14"/>
             <p:cNvSpPr txBox="1"/>
             <p:nvPr/>
           </p:nvSpPr>
           <p:spPr>
             <a:xfrm>
-              <a:off x="720000" y="8064000"/>
-              <a:ext cx="6264000" cy="612000"/>
+              <a:off x="3888000" y="7524000"/>
+              <a:ext cx="1512000" cy="720000"/>
             </a:xfrm>
             <a:prstGeom prst="rect">
               <a:avLst/>
@@ -3709,7 +3611,7 @@
             <a:noFill/>
           </p:spPr>
           <p:txBody>
-            <a:bodyPr wrap="square" anchor="ctr" lIns="0" rIns="0" tIns="0" bIns="0">
+            <a:bodyPr wrap="square" anchor="t" lIns="0" rIns="0" tIns="0" bIns="0">
               <a:spAutoFit/>
             </a:bodyPr>
             <a:lstStyle/>
@@ -3720,7 +3622,7 @@
                 </a:lnSpc>
               </a:pPr>
               <a:r>
-                <a:rPr sz="1300" b="0">
+                <a:rPr sz="1100" b="0">
                   <a:solidFill>
                     <a:srgbClr val="373C46"/>
                   </a:solidFill>
@@ -3734,28 +3636,67 @@
       </p:grpSp>
       <p:grpSp>
         <p:nvGrpSpPr>
-          <p:cNvPr id="22" name="GROUP_CHIP_4"/>
+          <p:cNvPr id="20" name="GROUP_CHIP_4"/>
           <p:cNvGrpSpPr/>
           <p:nvPr/>
         </p:nvGrpSpPr>
         <p:grpSpPr>
           <a:xfrm>
-            <a:off x="432000" y="8856000"/>
-            <a:ext cx="6696000" cy="612000"/>
-            <a:chOff x="432000" y="8856000"/>
-            <a:chExt cx="6696000" cy="612000"/>
+            <a:off x="5616000" y="7020000"/>
+            <a:ext cx="1512000" cy="1224000"/>
+            <a:chOff x="5616000" y="7020000"/>
+            <a:chExt cx="1512000" cy="1224000"/>
           </a:xfrm>
         </p:grpSpPr>
         <p:sp>
           <p:nvSpPr>
-            <p:cNvPr id="19" name="Rectangle 18"/>
+            <p:cNvPr id="17" name="TextBox 16"/>
+            <p:cNvSpPr txBox="1"/>
+            <p:nvPr/>
+          </p:nvSpPr>
+          <p:spPr>
+            <a:xfrm>
+              <a:off x="5616000" y="7020000"/>
+              <a:ext cx="1512000" cy="396000"/>
+            </a:xfrm>
+            <a:prstGeom prst="rect">
+              <a:avLst/>
+            </a:prstGeom>
+            <a:noFill/>
+          </p:spPr>
+          <p:txBody>
+            <a:bodyPr wrap="square" anchor="t" lIns="0" rIns="0" tIns="0" bIns="0">
+              <a:spAutoFit/>
+            </a:bodyPr>
+            <a:lstStyle/>
+            <a:p>
+              <a:pPr algn="l">
+                <a:lnSpc>
+                  <a:spcPct val="115000"/>
+                </a:lnSpc>
+              </a:pPr>
+              <a:r>
+                <a:rPr sz="1800" b="1">
+                  <a:solidFill>
+                    <a:srgbClr val="B08D57"/>
+                  </a:solidFill>
+                  <a:latin typeface="맑은 고딕"/>
+                </a:rPr>
+                <a:t>04</a:t>
+              </a:r>
+            </a:p>
+          </p:txBody>
+        </p:sp>
+        <p:sp>
+          <p:nvSpPr>
+            <p:cNvPr id="18" name="Rectangle 17"/>
             <p:cNvSpPr/>
             <p:nvPr/>
           </p:nvSpPr>
           <p:spPr>
             <a:xfrm>
-              <a:off x="432000" y="8856000"/>
-              <a:ext cx="6696000" cy="612000"/>
+              <a:off x="5616000" y="7416000"/>
+              <a:ext cx="288000" cy="15240"/>
             </a:xfrm>
             <a:prstGeom prst="rect">
               <a:avLst/>
@@ -3792,58 +3733,14 @@
         </p:sp>
         <p:sp>
           <p:nvSpPr>
-            <p:cNvPr id="20" name="Rectangle 19"/>
-            <p:cNvSpPr/>
-            <p:nvPr/>
-          </p:nvSpPr>
-          <p:spPr>
-            <a:xfrm>
-              <a:off x="432000" y="8856000"/>
-              <a:ext cx="108000" cy="612000"/>
-            </a:xfrm>
-            <a:prstGeom prst="rect">
-              <a:avLst/>
-            </a:prstGeom>
-            <a:solidFill>
-              <a:srgbClr val="B08D57"/>
-            </a:solidFill>
-            <a:ln>
-              <a:noFill/>
-            </a:ln>
-            <a:effectLst/>
-          </p:spPr>
-          <p:style>
-            <a:lnRef idx="1">
-              <a:schemeClr val="accent1"/>
-            </a:lnRef>
-            <a:fillRef idx="3">
-              <a:schemeClr val="accent1"/>
-            </a:fillRef>
-            <a:effectRef idx="2">
-              <a:schemeClr val="accent1"/>
-            </a:effectRef>
-            <a:fontRef idx="minor">
-              <a:schemeClr val="lt1"/>
-            </a:fontRef>
-          </p:style>
-          <p:txBody>
-            <a:bodyPr rtlCol="0" anchor="ctr"/>
-            <a:lstStyle/>
-            <a:p>
-              <a:pPr algn="ctr"/>
-            </a:p>
-          </p:txBody>
-        </p:sp>
-        <p:sp>
-          <p:nvSpPr>
-            <p:cNvPr id="21" name="TextBox 20"/>
+            <p:cNvPr id="19" name="TextBox 18"/>
             <p:cNvSpPr txBox="1"/>
             <p:nvPr/>
           </p:nvSpPr>
           <p:spPr>
             <a:xfrm>
-              <a:off x="720000" y="8856000"/>
-              <a:ext cx="6264000" cy="612000"/>
+              <a:off x="5616000" y="7524000"/>
+              <a:ext cx="1512000" cy="720000"/>
             </a:xfrm>
             <a:prstGeom prst="rect">
               <a:avLst/>
@@ -3851,7 +3748,7 @@
             <a:noFill/>
           </p:spPr>
           <p:txBody>
-            <a:bodyPr wrap="square" anchor="ctr" lIns="0" rIns="0" tIns="0" bIns="0">
+            <a:bodyPr wrap="square" anchor="t" lIns="0" rIns="0" tIns="0" bIns="0">
               <a:spAutoFit/>
             </a:bodyPr>
             <a:lstStyle/>
@@ -3862,7 +3759,7 @@
                 </a:lnSpc>
               </a:pPr>
               <a:r>
-                <a:rPr sz="1300" b="0">
+                <a:rPr sz="1100" b="0">
                   <a:solidFill>
                     <a:srgbClr val="373C46"/>
                   </a:solidFill>

--- a/templates/effect/effect_A.pptx
+++ b/templates/effect/effect_A.pptx
@@ -3098,7 +3098,97 @@
       <p:grpSpPr/>
       <p:sp>
         <p:nvSpPr>
-          <p:cNvPr id="2" name="TextBox 1"/>
+          <p:cNvPr id="2" name="Rectangle 1"/>
+          <p:cNvSpPr/>
+          <p:nvPr/>
+        </p:nvSpPr>
+        <p:spPr>
+          <a:xfrm>
+            <a:off x="0" y="0"/>
+            <a:ext cx="7560000" cy="10692000"/>
+          </a:xfrm>
+          <a:prstGeom prst="rect">
+            <a:avLst/>
+          </a:prstGeom>
+          <a:solidFill>
+            <a:srgbClr val="FAF8F4"/>
+          </a:solidFill>
+          <a:ln>
+            <a:noFill/>
+          </a:ln>
+          <a:effectLst/>
+        </p:spPr>
+        <p:style>
+          <a:lnRef idx="1">
+            <a:schemeClr val="accent1"/>
+          </a:lnRef>
+          <a:fillRef idx="3">
+            <a:schemeClr val="accent1"/>
+          </a:fillRef>
+          <a:effectRef idx="2">
+            <a:schemeClr val="accent1"/>
+          </a:effectRef>
+          <a:fontRef idx="minor">
+            <a:schemeClr val="lt1"/>
+          </a:fontRef>
+        </p:style>
+        <p:txBody>
+          <a:bodyPr rtlCol="0" anchor="ctr"/>
+          <a:lstStyle/>
+          <a:p>
+            <a:pPr algn="ctr"/>
+          </a:p>
+        </p:txBody>
+      </p:sp>
+      <p:sp>
+        <p:nvSpPr>
+          <p:cNvPr id="3" name="Oval 2"/>
+          <p:cNvSpPr/>
+          <p:nvPr/>
+        </p:nvSpPr>
+        <p:spPr>
+          <a:xfrm>
+            <a:off x="-4680000" y="8172000"/>
+            <a:ext cx="7560000" cy="7560000"/>
+          </a:xfrm>
+          <a:prstGeom prst="ellipse">
+            <a:avLst/>
+          </a:prstGeom>
+          <a:solidFill>
+            <a:srgbClr val="C4B28C">
+              <a:alpha val="5000"/>
+            </a:srgbClr>
+          </a:solidFill>
+          <a:ln>
+            <a:noFill/>
+          </a:ln>
+          <a:effectLst/>
+        </p:spPr>
+        <p:style>
+          <a:lnRef idx="1">
+            <a:schemeClr val="accent1"/>
+          </a:lnRef>
+          <a:fillRef idx="3">
+            <a:schemeClr val="accent1"/>
+          </a:fillRef>
+          <a:effectRef idx="2">
+            <a:schemeClr val="accent1"/>
+          </a:effectRef>
+          <a:fontRef idx="minor">
+            <a:schemeClr val="lt1"/>
+          </a:fontRef>
+        </p:style>
+        <p:txBody>
+          <a:bodyPr rtlCol="0" anchor="ctr"/>
+          <a:lstStyle/>
+          <a:p>
+            <a:pPr algn="ctr"/>
+          </a:p>
+        </p:txBody>
+      </p:sp>
+      <p:sp>
+        <p:nvSpPr>
+          <p:cNvPr id="4" name="TextBox 3"/>
           <p:cNvSpPr txBox="1"/>
           <p:nvPr/>
         </p:nvSpPr>
@@ -3137,7 +3227,7 @@
       </p:sp>
       <p:sp>
         <p:nvSpPr>
-          <p:cNvPr id="3" name="Rectangle 2"/>
+          <p:cNvPr id="5" name="Rectangle 4"/>
           <p:cNvSpPr/>
           <p:nvPr/>
         </p:nvSpPr>
@@ -3181,7 +3271,7 @@
       </p:sp>
       <p:sp>
         <p:nvSpPr>
-          <p:cNvPr id="4" name="PHOTO_1"/>
+          <p:cNvPr id="6" name="PHOTO_1"/>
           <p:cNvSpPr/>
           <p:nvPr/>
         </p:nvSpPr>
@@ -3225,7 +3315,7 @@
       </p:sp>
       <p:grpSp>
         <p:nvGrpSpPr>
-          <p:cNvPr id="8" name="GROUP_CHIP_1"/>
+          <p:cNvPr id="10" name="GROUP_CHIP_1"/>
           <p:cNvGrpSpPr/>
           <p:nvPr/>
         </p:nvGrpSpPr>
@@ -3239,7 +3329,7 @@
         </p:grpSpPr>
         <p:sp>
           <p:nvSpPr>
-            <p:cNvPr id="5" name="TextBox 4"/>
+            <p:cNvPr id="7" name="TextBox 6"/>
             <p:cNvSpPr txBox="1"/>
             <p:nvPr/>
           </p:nvSpPr>
@@ -3278,7 +3368,7 @@
         </p:sp>
         <p:sp>
           <p:nvSpPr>
-            <p:cNvPr id="6" name="Rectangle 5"/>
+            <p:cNvPr id="8" name="Rectangle 7"/>
             <p:cNvSpPr/>
             <p:nvPr/>
           </p:nvSpPr>
@@ -3322,7 +3412,7 @@
         </p:sp>
         <p:sp>
           <p:nvSpPr>
-            <p:cNvPr id="7" name="TextBox 6"/>
+            <p:cNvPr id="9" name="TextBox 8"/>
             <p:cNvSpPr txBox="1"/>
             <p:nvPr/>
           </p:nvSpPr>
@@ -3362,7 +3452,7 @@
       </p:grpSp>
       <p:grpSp>
         <p:nvGrpSpPr>
-          <p:cNvPr id="12" name="GROUP_CHIP_2"/>
+          <p:cNvPr id="14" name="GROUP_CHIP_2"/>
           <p:cNvGrpSpPr/>
           <p:nvPr/>
         </p:nvGrpSpPr>
@@ -3376,7 +3466,7 @@
         </p:grpSpPr>
         <p:sp>
           <p:nvSpPr>
-            <p:cNvPr id="9" name="TextBox 8"/>
+            <p:cNvPr id="11" name="TextBox 10"/>
             <p:cNvSpPr txBox="1"/>
             <p:nvPr/>
           </p:nvSpPr>
@@ -3415,7 +3505,7 @@
         </p:sp>
         <p:sp>
           <p:nvSpPr>
-            <p:cNvPr id="10" name="Rectangle 9"/>
+            <p:cNvPr id="12" name="Rectangle 11"/>
             <p:cNvSpPr/>
             <p:nvPr/>
           </p:nvSpPr>
@@ -3459,7 +3549,7 @@
         </p:sp>
         <p:sp>
           <p:nvSpPr>
-            <p:cNvPr id="11" name="TextBox 10"/>
+            <p:cNvPr id="13" name="TextBox 12"/>
             <p:cNvSpPr txBox="1"/>
             <p:nvPr/>
           </p:nvSpPr>
@@ -3499,7 +3589,7 @@
       </p:grpSp>
       <p:grpSp>
         <p:nvGrpSpPr>
-          <p:cNvPr id="16" name="GROUP_CHIP_3"/>
+          <p:cNvPr id="18" name="GROUP_CHIP_3"/>
           <p:cNvGrpSpPr/>
           <p:nvPr/>
         </p:nvGrpSpPr>
@@ -3513,7 +3603,7 @@
         </p:grpSpPr>
         <p:sp>
           <p:nvSpPr>
-            <p:cNvPr id="13" name="TextBox 12"/>
+            <p:cNvPr id="15" name="TextBox 14"/>
             <p:cNvSpPr txBox="1"/>
             <p:nvPr/>
           </p:nvSpPr>
@@ -3552,7 +3642,7 @@
         </p:sp>
         <p:sp>
           <p:nvSpPr>
-            <p:cNvPr id="14" name="Rectangle 13"/>
+            <p:cNvPr id="16" name="Rectangle 15"/>
             <p:cNvSpPr/>
             <p:nvPr/>
           </p:nvSpPr>
@@ -3596,7 +3686,7 @@
         </p:sp>
         <p:sp>
           <p:nvSpPr>
-            <p:cNvPr id="15" name="TextBox 14"/>
+            <p:cNvPr id="17" name="TextBox 16"/>
             <p:cNvSpPr txBox="1"/>
             <p:nvPr/>
           </p:nvSpPr>
@@ -3636,7 +3726,7 @@
       </p:grpSp>
       <p:grpSp>
         <p:nvGrpSpPr>
-          <p:cNvPr id="20" name="GROUP_CHIP_4"/>
+          <p:cNvPr id="22" name="GROUP_CHIP_4"/>
           <p:cNvGrpSpPr/>
           <p:nvPr/>
         </p:nvGrpSpPr>
@@ -3650,7 +3740,7 @@
         </p:grpSpPr>
         <p:sp>
           <p:nvSpPr>
-            <p:cNvPr id="17" name="TextBox 16"/>
+            <p:cNvPr id="19" name="TextBox 18"/>
             <p:cNvSpPr txBox="1"/>
             <p:nvPr/>
           </p:nvSpPr>
@@ -3689,7 +3779,7 @@
         </p:sp>
         <p:sp>
           <p:nvSpPr>
-            <p:cNvPr id="18" name="Rectangle 17"/>
+            <p:cNvPr id="20" name="Rectangle 19"/>
             <p:cNvSpPr/>
             <p:nvPr/>
           </p:nvSpPr>
@@ -3733,7 +3823,7 @@
         </p:sp>
         <p:sp>
           <p:nvSpPr>
-            <p:cNvPr id="19" name="TextBox 18"/>
+            <p:cNvPr id="21" name="TextBox 20"/>
             <p:cNvSpPr txBox="1"/>
             <p:nvPr/>
           </p:nvSpPr>
